--- a/prez/Math-website.pptx
+++ b/prez/Math-website.pptx
@@ -108,6 +108,11 @@
       </a:defRPr>
     </a:lvl9pPr>
   </p:defaultTextStyle>
+  <p:extLst>
+    <p:ext uri="{EFAFB233-063F-42B5-8137-9DF3F51BA10A}">
+      <p15:sldGuideLst xmlns:p15="http://schemas.microsoft.com/office/powerpoint/2012/main"/>
+    </p:ext>
+  </p:extLst>
 </p:presentation>
 </file>
 
@@ -258,7 +263,7 @@
           <a:p>
             <a:fld id="{0F6F3B5C-E6EC-45E3-8915-BC5031EF6374}" type="datetimeFigureOut">
               <a:rPr lang="ru-RU" smtClean="0"/>
-              <a:t>11.04.2026</a:t>
+              <a:t>14.04.2026</a:t>
             </a:fld>
             <a:endParaRPr lang="ru-RU"/>
           </a:p>
@@ -456,7 +461,7 @@
           <a:p>
             <a:fld id="{0F6F3B5C-E6EC-45E3-8915-BC5031EF6374}" type="datetimeFigureOut">
               <a:rPr lang="ru-RU" smtClean="0"/>
-              <a:t>11.04.2026</a:t>
+              <a:t>14.04.2026</a:t>
             </a:fld>
             <a:endParaRPr lang="ru-RU"/>
           </a:p>
@@ -664,7 +669,7 @@
           <a:p>
             <a:fld id="{0F6F3B5C-E6EC-45E3-8915-BC5031EF6374}" type="datetimeFigureOut">
               <a:rPr lang="ru-RU" smtClean="0"/>
-              <a:t>11.04.2026</a:t>
+              <a:t>14.04.2026</a:t>
             </a:fld>
             <a:endParaRPr lang="ru-RU"/>
           </a:p>
@@ -862,7 +867,7 @@
           <a:p>
             <a:fld id="{0F6F3B5C-E6EC-45E3-8915-BC5031EF6374}" type="datetimeFigureOut">
               <a:rPr lang="ru-RU" smtClean="0"/>
-              <a:t>11.04.2026</a:t>
+              <a:t>14.04.2026</a:t>
             </a:fld>
             <a:endParaRPr lang="ru-RU"/>
           </a:p>
@@ -1137,7 +1142,7 @@
           <a:p>
             <a:fld id="{0F6F3B5C-E6EC-45E3-8915-BC5031EF6374}" type="datetimeFigureOut">
               <a:rPr lang="ru-RU" smtClean="0"/>
-              <a:t>11.04.2026</a:t>
+              <a:t>14.04.2026</a:t>
             </a:fld>
             <a:endParaRPr lang="ru-RU"/>
           </a:p>
@@ -1402,7 +1407,7 @@
           <a:p>
             <a:fld id="{0F6F3B5C-E6EC-45E3-8915-BC5031EF6374}" type="datetimeFigureOut">
               <a:rPr lang="ru-RU" smtClean="0"/>
-              <a:t>11.04.2026</a:t>
+              <a:t>14.04.2026</a:t>
             </a:fld>
             <a:endParaRPr lang="ru-RU"/>
           </a:p>
@@ -1814,7 +1819,7 @@
           <a:p>
             <a:fld id="{0F6F3B5C-E6EC-45E3-8915-BC5031EF6374}" type="datetimeFigureOut">
               <a:rPr lang="ru-RU" smtClean="0"/>
-              <a:t>11.04.2026</a:t>
+              <a:t>14.04.2026</a:t>
             </a:fld>
             <a:endParaRPr lang="ru-RU"/>
           </a:p>
@@ -1955,7 +1960,7 @@
           <a:p>
             <a:fld id="{0F6F3B5C-E6EC-45E3-8915-BC5031EF6374}" type="datetimeFigureOut">
               <a:rPr lang="ru-RU" smtClean="0"/>
-              <a:t>11.04.2026</a:t>
+              <a:t>14.04.2026</a:t>
             </a:fld>
             <a:endParaRPr lang="ru-RU"/>
           </a:p>
@@ -2068,7 +2073,7 @@
           <a:p>
             <a:fld id="{0F6F3B5C-E6EC-45E3-8915-BC5031EF6374}" type="datetimeFigureOut">
               <a:rPr lang="ru-RU" smtClean="0"/>
-              <a:t>11.04.2026</a:t>
+              <a:t>14.04.2026</a:t>
             </a:fld>
             <a:endParaRPr lang="ru-RU"/>
           </a:p>
@@ -2379,7 +2384,7 @@
           <a:p>
             <a:fld id="{0F6F3B5C-E6EC-45E3-8915-BC5031EF6374}" type="datetimeFigureOut">
               <a:rPr lang="ru-RU" smtClean="0"/>
-              <a:t>11.04.2026</a:t>
+              <a:t>14.04.2026</a:t>
             </a:fld>
             <a:endParaRPr lang="ru-RU"/>
           </a:p>
@@ -2667,7 +2672,7 @@
           <a:p>
             <a:fld id="{0F6F3B5C-E6EC-45E3-8915-BC5031EF6374}" type="datetimeFigureOut">
               <a:rPr lang="ru-RU" smtClean="0"/>
-              <a:t>11.04.2026</a:t>
+              <a:t>14.04.2026</a:t>
             </a:fld>
             <a:endParaRPr lang="ru-RU"/>
           </a:p>
@@ -2908,7 +2913,7 @@
           <a:p>
             <a:fld id="{0F6F3B5C-E6EC-45E3-8915-BC5031EF6374}" type="datetimeFigureOut">
               <a:rPr lang="ru-RU" smtClean="0"/>
-              <a:t>11.04.2026</a:t>
+              <a:t>14.04.2026</a:t>
             </a:fld>
             <a:endParaRPr lang="ru-RU"/>
           </a:p>
@@ -3644,7 +3649,7 @@
               <a:rPr lang="ru-RU" sz="2800" b="1" dirty="0">
                 <a:latin typeface="Consolas" panose="020B0609020204030204" pitchFamily="49" charset="0"/>
               </a:rPr>
-              <a:t>Нам со Львом нравиться математика</a:t>
+              <a:t>Нам со Львом нравится математика</a:t>
             </a:r>
             <a:r>
               <a:rPr lang="en-US" sz="2800" b="1" dirty="0">
@@ -3915,41 +3920,6 @@
           </a:p>
         </p:txBody>
       </p:sp>
-      <p:sp>
-        <p:nvSpPr>
-          <p:cNvPr id="4" name="TextBox 3">
-            <a:extLst>
-              <a:ext uri="{FF2B5EF4-FFF2-40B4-BE49-F238E27FC236}">
-                <a16:creationId xmlns:a16="http://schemas.microsoft.com/office/drawing/2014/main" id="{73F99619-722D-43E4-81F4-982536E04AA2}"/>
-              </a:ext>
-            </a:extLst>
-          </p:cNvPr>
-          <p:cNvSpPr txBox="1"/>
-          <p:nvPr/>
-        </p:nvSpPr>
-        <p:spPr>
-          <a:xfrm>
-            <a:off x="1124465" y="4782065"/>
-            <a:ext cx="8260492" cy="369332"/>
-          </a:xfrm>
-          <a:prstGeom prst="rect">
-            <a:avLst/>
-          </a:prstGeom>
-          <a:noFill/>
-        </p:spPr>
-        <p:txBody>
-          <a:bodyPr wrap="square" rtlCol="0">
-            <a:spAutoFit/>
-          </a:bodyPr>
-          <a:lstStyle/>
-          <a:p>
-            <a:r>
-              <a:rPr lang="ru-RU" dirty="0"/>
-              <a:t>Какой-то сложный код для понимания(потом)</a:t>
-            </a:r>
-          </a:p>
-        </p:txBody>
-      </p:sp>
     </p:spTree>
     <p:extLst>
       <p:ext uri="{BB962C8B-B14F-4D97-AF65-F5344CB8AC3E}">
@@ -4202,54 +4172,36 @@
           </a:p>
         </p:txBody>
       </p:sp>
-      <p:sp>
-        <p:nvSpPr>
-          <p:cNvPr id="3" name="TextBox 2">
-            <a:extLst>
-              <a:ext uri="{FF2B5EF4-FFF2-40B4-BE49-F238E27FC236}">
-                <a16:creationId xmlns:a16="http://schemas.microsoft.com/office/drawing/2014/main" id="{85D9860A-0767-44C8-A779-B58DF9E1F103}"/>
-              </a:ext>
-            </a:extLst>
-          </p:cNvPr>
-          <p:cNvSpPr txBox="1"/>
+      <p:pic>
+        <p:nvPicPr>
+          <p:cNvPr id="5" name="Рисунок 4">
+            <a:extLst>
+              <a:ext uri="{FF2B5EF4-FFF2-40B4-BE49-F238E27FC236}">
+                <a16:creationId xmlns:a16="http://schemas.microsoft.com/office/drawing/2014/main" id="{C758F049-BFC8-3EBD-CBC9-30B644C888D3}"/>
+              </a:ext>
+            </a:extLst>
+          </p:cNvPr>
+          <p:cNvPicPr>
+            <a:picLocks noChangeAspect="1"/>
+          </p:cNvPicPr>
           <p:nvPr/>
-        </p:nvSpPr>
+        </p:nvPicPr>
+        <p:blipFill>
+          <a:blip r:embed="rId2"/>
+          <a:stretch>
+            <a:fillRect/>
+          </a:stretch>
+        </p:blipFill>
         <p:spPr>
           <a:xfrm>
-            <a:off x="2045043" y="3083011"/>
-            <a:ext cx="3441357" cy="369332"/>
+            <a:off x="873897" y="2344380"/>
+            <a:ext cx="9499600" cy="3169007"/>
           </a:xfrm>
           <a:prstGeom prst="rect">
             <a:avLst/>
           </a:prstGeom>
-          <a:noFill/>
         </p:spPr>
-        <p:txBody>
-          <a:bodyPr wrap="square" rtlCol="0">
-            <a:spAutoFit/>
-          </a:bodyPr>
-          <a:lstStyle/>
-          <a:p>
-            <a:r>
-              <a:rPr lang="ru-RU" dirty="0"/>
-              <a:t>Что </a:t>
-            </a:r>
-            <a:r>
-              <a:rPr lang="ru-RU" dirty="0" err="1"/>
-              <a:t>нибудь</a:t>
-            </a:r>
-            <a:r>
-              <a:rPr lang="ru-RU" dirty="0"/>
-              <a:t> вставить</a:t>
-            </a:r>
-            <a:r>
-              <a:rPr lang="ru-RU"/>
-              <a:t>(потом)</a:t>
-            </a:r>
-            <a:endParaRPr lang="ru-RU" dirty="0"/>
-          </a:p>
-        </p:txBody>
-      </p:sp>
+      </p:pic>
     </p:spTree>
     <p:extLst>
       <p:ext uri="{BB962C8B-B14F-4D97-AF65-F5344CB8AC3E}">
